--- a/curriculum/M02/W08/L01/slides.pptx
+++ b/curriculum/M02/W08/L01/slides.pptx
@@ -6506,11 +6506,40 @@
                 <a:ea typeface="Malgun Gothic"/>
                 <a:cs typeface="Malgun Gothic"/>
               </a:rPr>
-              <a:t>이 필요하다. 첫 반응이며 전체 속도에 가장 크게 기여한다. 2. </a:t>
-            </a:r>
+              <a:t>이 필요하다. 첫 반응이며 전체 속도에 가장 크게 기여한다.</a:t>
+            </a:r>
+          </a:p>
+          <a:p>
+            <a:pPr>
+              <a:spcAft>
+                <a:spcPts val="900"/>
+              </a:spcAft>
+            </a:pPr>
             <a:r>
               <a:rPr sz="1400" b="1" i="0">
                 <a:solidFill>
+                  <a:srgbClr val="F2B705"/>
+                </a:solidFill>
+                <a:latin typeface="Malgun Gothic"/>
+                <a:ea typeface="Malgun Gothic"/>
+                <a:cs typeface="Malgun Gothic"/>
+              </a:rPr>
+              <a:t>•  </a:t>
+            </a:r>
+            <a:r>
+              <a:rPr sz="1400" b="0" i="0">
+                <a:solidFill>
+                  <a:srgbClr val="11202B"/>
+                </a:solidFill>
+                <a:latin typeface="Malgun Gothic"/>
+                <a:ea typeface="Malgun Gothic"/>
+                <a:cs typeface="Malgun Gothic"/>
+              </a:rPr>
+              <a:t>2. </a:t>
+            </a:r>
+            <a:r>
+              <a:rPr sz="1400" b="1" i="0">
+                <a:solidFill>
                   <a:srgbClr val="11202B"/>
                 </a:solidFill>
                 <a:latin typeface="Malgun Gothic"/>
@@ -6550,7 +6579,36 @@
                 <a:ea typeface="Malgun Gothic"/>
                 <a:cs typeface="Malgun Gothic"/>
               </a:rPr>
-              <a:t>다. 3. </a:t>
+              <a:t>다.</a:t>
+            </a:r>
+          </a:p>
+          <a:p>
+            <a:pPr>
+              <a:spcAft>
+                <a:spcPts val="900"/>
+              </a:spcAft>
+            </a:pPr>
+            <a:r>
+              <a:rPr sz="1400" b="1" i="0">
+                <a:solidFill>
+                  <a:srgbClr val="F2B705"/>
+                </a:solidFill>
+                <a:latin typeface="Malgun Gothic"/>
+                <a:ea typeface="Malgun Gothic"/>
+                <a:cs typeface="Malgun Gothic"/>
+              </a:rPr>
+              <a:t>•  </a:t>
+            </a:r>
+            <a:r>
+              <a:rPr sz="1400" b="0" i="0">
+                <a:solidFill>
+                  <a:srgbClr val="11202B"/>
+                </a:solidFill>
+                <a:latin typeface="Malgun Gothic"/>
+                <a:ea typeface="Malgun Gothic"/>
+                <a:cs typeface="Malgun Gothic"/>
+              </a:rPr>
+              <a:t>3. </a:t>
             </a:r>
             <a:r>
               <a:rPr sz="1400" b="1" i="0">
@@ -19522,7 +19580,7 @@
               </a:spcAft>
             </a:pPr>
             <a:r>
-              <a:rPr sz="1600" b="1" i="0">
+              <a:rPr sz="1400" b="1" i="0">
                 <a:solidFill>
                   <a:srgbClr val="F2B705"/>
                 </a:solidFill>
@@ -19533,7 +19591,7 @@
               <a:t>•  </a:t>
             </a:r>
             <a:r>
-              <a:rPr sz="1600" b="0" i="0">
+              <a:rPr sz="1400" b="0" i="0">
                 <a:solidFill>
                   <a:srgbClr val="11202B"/>
                 </a:solidFill>
@@ -19551,7 +19609,7 @@
               </a:spcAft>
             </a:pPr>
             <a:r>
-              <a:rPr sz="1600" b="1" i="0">
+              <a:rPr sz="1400" b="1" i="0">
                 <a:solidFill>
                   <a:srgbClr val="F2B705"/>
                 </a:solidFill>
@@ -19562,7 +19620,7 @@
               <a:t>•  </a:t>
             </a:r>
             <a:r>
-              <a:rPr sz="1600" b="1" i="0">
+              <a:rPr sz="1400" b="1" i="0">
                 <a:solidFill>
                   <a:srgbClr val="11202B"/>
                 </a:solidFill>
@@ -19580,7 +19638,7 @@
               </a:spcAft>
             </a:pPr>
             <a:r>
-              <a:rPr sz="1600" b="1" i="0">
+              <a:rPr sz="1400" b="1" i="0">
                 <a:solidFill>
                   <a:srgbClr val="F2B705"/>
                 </a:solidFill>
@@ -19591,7 +19649,7 @@
               <a:t>•  </a:t>
             </a:r>
             <a:r>
-              <a:rPr sz="1600" b="0" i="0">
+              <a:rPr sz="1400" b="0" i="0">
                 <a:solidFill>
                   <a:srgbClr val="11202B"/>
                 </a:solidFill>
@@ -19602,7 +19660,7 @@
               <a:t>출발 물질은 </a:t>
             </a:r>
             <a:r>
-              <a:rPr sz="1600" b="1" i="0">
+              <a:rPr sz="1400" b="1" i="0">
                 <a:solidFill>
                   <a:srgbClr val="11202B"/>
                 </a:solidFill>
@@ -19613,7 +19671,7 @@
               <a:t>glycerol 3-phosphate</a:t>
             </a:r>
             <a:r>
-              <a:rPr sz="1600" b="0" i="0">
+              <a:rPr sz="1400" b="0" i="0">
                 <a:solidFill>
                   <a:srgbClr val="11202B"/>
                 </a:solidFill>
@@ -19631,7 +19689,7 @@
               </a:spcAft>
             </a:pPr>
             <a:r>
-              <a:rPr sz="1600" b="1" i="0">
+              <a:rPr sz="1400" b="1" i="0">
                 <a:solidFill>
                   <a:srgbClr val="F2B705"/>
                 </a:solidFill>
@@ -19642,7 +19700,7 @@
               <a:t>•  </a:t>
             </a:r>
             <a:r>
-              <a:rPr sz="1600" b="1" i="0">
+              <a:rPr sz="1400" b="1" i="0">
                 <a:solidFill>
                   <a:srgbClr val="11202B"/>
                 </a:solidFill>
@@ -19653,7 +19711,7 @@
               <a:t>간과 신장</a:t>
             </a:r>
             <a:r>
-              <a:rPr sz="1600" b="0" i="0">
+              <a:rPr sz="1400" b="0" i="0">
                 <a:solidFill>
                   <a:srgbClr val="11202B"/>
                 </a:solidFill>
@@ -19664,7 +19722,7 @@
               <a:t>: </a:t>
             </a:r>
             <a:r>
-              <a:rPr sz="1600" b="1" i="0">
+              <a:rPr sz="1400" b="1" i="0">
                 <a:solidFill>
                   <a:srgbClr val="11202B"/>
                 </a:solidFill>
@@ -19675,7 +19733,7 @@
               <a:t>glycerol kinase</a:t>
             </a:r>
             <a:r>
-              <a:rPr sz="1600" b="0" i="0">
+              <a:rPr sz="1400" b="0" i="0">
                 <a:solidFill>
                   <a:srgbClr val="11202B"/>
                 </a:solidFill>
@@ -19693,7 +19751,7 @@
               </a:spcAft>
             </a:pPr>
             <a:r>
-              <a:rPr sz="1600" b="1" i="0">
+              <a:rPr sz="1400" b="1" i="0">
                 <a:solidFill>
                   <a:srgbClr val="F2B705"/>
                 </a:solidFill>
@@ -19704,7 +19762,7 @@
               <a:t>•  </a:t>
             </a:r>
             <a:r>
-              <a:rPr sz="1600" b="1" i="0">
+              <a:rPr sz="1400" b="1" i="0">
                 <a:solidFill>
                   <a:srgbClr val="11202B"/>
                 </a:solidFill>
@@ -19715,7 +19773,7 @@
               <a:t>지방조직</a:t>
             </a:r>
             <a:r>
-              <a:rPr sz="1600" b="0" i="0">
+              <a:rPr sz="1400" b="0" i="0">
                 <a:solidFill>
                   <a:srgbClr val="11202B"/>
                 </a:solidFill>
@@ -19726,7 +19784,7 @@
               <a:t>: </a:t>
             </a:r>
             <a:r>
-              <a:rPr sz="1600" b="1" i="0">
+              <a:rPr sz="1400" b="1" i="0">
                 <a:solidFill>
                   <a:srgbClr val="11202B"/>
                 </a:solidFill>
@@ -19737,7 +19795,7 @@
               <a:t>glycerol kinase가 없다.</a:t>
             </a:r>
             <a:r>
-              <a:rPr sz="1600" b="0" i="0">
+              <a:rPr sz="1400" b="0" i="0">
                 <a:solidFill>
                   <a:srgbClr val="11202B"/>
                 </a:solidFill>
@@ -19755,7 +19813,7 @@
               </a:spcAft>
             </a:pPr>
             <a:r>
-              <a:rPr sz="1600" b="1" i="0">
+              <a:rPr sz="1400" b="1" i="0">
                 <a:solidFill>
                   <a:srgbClr val="F2B705"/>
                 </a:solidFill>
@@ -19766,7 +19824,7 @@
               <a:t>•  </a:t>
             </a:r>
             <a:r>
-              <a:rPr sz="1600" b="0" i="0">
+              <a:rPr sz="1400" b="0" i="0">
                 <a:solidFill>
                   <a:srgbClr val="11202B"/>
                 </a:solidFill>
@@ -19777,7 +19835,7 @@
               <a:t>이 차이가 중요한 결과를 낳는다. </a:t>
             </a:r>
             <a:r>
-              <a:rPr sz="1600" b="1" i="0">
+              <a:rPr sz="1400" b="1" i="0">
                 <a:solidFill>
                   <a:srgbClr val="11202B"/>
                 </a:solidFill>
@@ -19788,7 +19846,7 @@
               <a:t>지방조직은 포도당 없이 지방을 저장할 수 없다.</a:t>
             </a:r>
             <a:r>
-              <a:rPr sz="1600" b="0" i="0">
+              <a:rPr sz="1400" b="0" i="0">
                 <a:solidFill>
                   <a:srgbClr val="11202B"/>
                 </a:solidFill>
@@ -19806,7 +19864,7 @@
               </a:spcAft>
             </a:pPr>
             <a:r>
-              <a:rPr sz="1600" b="1" i="0">
+              <a:rPr sz="1400" b="1" i="0">
                 <a:solidFill>
                   <a:srgbClr val="F2B705"/>
                 </a:solidFill>
@@ -19817,7 +19875,7 @@
               <a:t>•  </a:t>
             </a:r>
             <a:r>
-              <a:rPr sz="1600" b="0" i="0">
+              <a:rPr sz="1400" b="0" i="0">
                 <a:solidFill>
                   <a:srgbClr val="11202B"/>
                 </a:solidFill>
@@ -19826,6 +19884,130 @@
                 <a:cs typeface="Malgun Gothic"/>
               </a:rPr>
               <a:t>이후 반응은 네 단계다.</a:t>
+            </a:r>
+          </a:p>
+          <a:p>
+            <a:pPr>
+              <a:spcAft>
+                <a:spcPts val="900"/>
+              </a:spcAft>
+            </a:pPr>
+            <a:r>
+              <a:rPr sz="1400" b="1" i="0">
+                <a:solidFill>
+                  <a:srgbClr val="F2B705"/>
+                </a:solidFill>
+                <a:latin typeface="Malgun Gothic"/>
+                <a:ea typeface="Malgun Gothic"/>
+                <a:cs typeface="Malgun Gothic"/>
+              </a:rPr>
+              <a:t>•  </a:t>
+            </a:r>
+            <a:r>
+              <a:rPr sz="1400" b="0" i="0">
+                <a:solidFill>
+                  <a:srgbClr val="11202B"/>
+                </a:solidFill>
+                <a:latin typeface="Malgun Gothic"/>
+                <a:ea typeface="Malgun Gothic"/>
+                <a:cs typeface="Malgun Gothic"/>
+              </a:rPr>
+              <a:t>1. </a:t>
+            </a:r>
+            <a:r>
+              <a:rPr sz="1400" b="1" i="0">
+                <a:solidFill>
+                  <a:srgbClr val="11202B"/>
+                </a:solidFill>
+                <a:latin typeface="Malgun Gothic"/>
+                <a:ea typeface="Malgun Gothic"/>
+                <a:cs typeface="Malgun Gothic"/>
+              </a:rPr>
+              <a:t>GPAT</a:t>
+            </a:r>
+            <a:r>
+              <a:rPr sz="1400" b="0" i="0">
+                <a:solidFill>
+                  <a:srgbClr val="11202B"/>
+                </a:solidFill>
+                <a:latin typeface="Malgun Gothic"/>
+                <a:ea typeface="Malgun Gothic"/>
+                <a:cs typeface="Malgun Gothic"/>
+              </a:rPr>
+              <a:t>가 glycerol 3-phosphate의 sn-1에 acyl기를 붙여 lysophosphatidate를 만든다.</a:t>
+            </a:r>
+          </a:p>
+          <a:p>
+            <a:pPr>
+              <a:spcAft>
+                <a:spcPts val="900"/>
+              </a:spcAft>
+            </a:pPr>
+            <a:r>
+              <a:rPr sz="1400" b="1" i="0">
+                <a:solidFill>
+                  <a:srgbClr val="F2B705"/>
+                </a:solidFill>
+                <a:latin typeface="Malgun Gothic"/>
+                <a:ea typeface="Malgun Gothic"/>
+                <a:cs typeface="Malgun Gothic"/>
+              </a:rPr>
+              <a:t>•  </a:t>
+            </a:r>
+            <a:r>
+              <a:rPr sz="1400" b="0" i="0">
+                <a:solidFill>
+                  <a:srgbClr val="11202B"/>
+                </a:solidFill>
+                <a:latin typeface="Malgun Gothic"/>
+                <a:ea typeface="Malgun Gothic"/>
+                <a:cs typeface="Malgun Gothic"/>
+              </a:rPr>
+              <a:t>2. </a:t>
+            </a:r>
+            <a:r>
+              <a:rPr sz="1400" b="1" i="0">
+                <a:solidFill>
+                  <a:srgbClr val="11202B"/>
+                </a:solidFill>
+                <a:latin typeface="Malgun Gothic"/>
+                <a:ea typeface="Malgun Gothic"/>
+                <a:cs typeface="Malgun Gothic"/>
+              </a:rPr>
+              <a:t>AGPAT</a:t>
+            </a:r>
+            <a:r>
+              <a:rPr sz="1400" b="0" i="0">
+                <a:solidFill>
+                  <a:srgbClr val="11202B"/>
+                </a:solidFill>
+                <a:latin typeface="Malgun Gothic"/>
+                <a:ea typeface="Malgun Gothic"/>
+                <a:cs typeface="Malgun Gothic"/>
+              </a:rPr>
+              <a:t>가 sn-2에 붙여 </a:t>
+            </a:r>
+            <a:r>
+              <a:rPr sz="1400" b="1" i="0">
+                <a:solidFill>
+                  <a:srgbClr val="11202B"/>
+                </a:solidFill>
+                <a:latin typeface="Malgun Gothic"/>
+                <a:ea typeface="Malgun Gothic"/>
+                <a:cs typeface="Malgun Gothic"/>
+              </a:rPr>
+              <a:t>phosphatidate</a:t>
+            </a:r>
+            <a:r>
+              <a:rPr sz="1400" b="0" i="0">
+                <a:solidFill>
+                  <a:srgbClr val="11202B"/>
+                </a:solidFill>
+                <a:latin typeface="Malgun Gothic"/>
+                <a:ea typeface="Malgun Gothic"/>
+                <a:cs typeface="Malgun Gothic"/>
+              </a:rPr>
+              <a:t>(diacylglycerol 3-phosphate)를 만든다.</a:t>
             </a:r>
           </a:p>
         </p:txBody>
@@ -20102,7 +20284,7 @@
               </a:spcAft>
             </a:pPr>
             <a:r>
-              <a:rPr sz="1600" b="1" i="0">
+              <a:rPr sz="1800" b="1" i="0">
                 <a:solidFill>
                   <a:srgbClr val="F2B705"/>
                 </a:solidFill>
@@ -20113,84 +20295,18 @@
               <a:t>•  </a:t>
             </a:r>
             <a:r>
-              <a:rPr sz="1600" b="0" i="0">
-                <a:solidFill>
-                  <a:srgbClr val="11202B"/>
-                </a:solidFill>
-                <a:latin typeface="Malgun Gothic"/>
-                <a:ea typeface="Malgun Gothic"/>
-                <a:cs typeface="Malgun Gothic"/>
-              </a:rPr>
-              <a:t>1. </a:t>
-            </a:r>
-            <a:r>
-              <a:rPr sz="1600" b="1" i="0">
-                <a:solidFill>
-                  <a:srgbClr val="11202B"/>
-                </a:solidFill>
-                <a:latin typeface="Malgun Gothic"/>
-                <a:ea typeface="Malgun Gothic"/>
-                <a:cs typeface="Malgun Gothic"/>
-              </a:rPr>
-              <a:t>GPAT</a:t>
-            </a:r>
-            <a:r>
-              <a:rPr sz="1600" b="0" i="0">
-                <a:solidFill>
-                  <a:srgbClr val="11202B"/>
-                </a:solidFill>
-                <a:latin typeface="Malgun Gothic"/>
-                <a:ea typeface="Malgun Gothic"/>
-                <a:cs typeface="Malgun Gothic"/>
-              </a:rPr>
-              <a:t>가 glycerol 3-phosphate의 sn-1에 acyl기를 붙여 lysophosphatidate를 만든다. 2. </a:t>
-            </a:r>
-            <a:r>
-              <a:rPr sz="1600" b="1" i="0">
-                <a:solidFill>
-                  <a:srgbClr val="11202B"/>
-                </a:solidFill>
-                <a:latin typeface="Malgun Gothic"/>
-                <a:ea typeface="Malgun Gothic"/>
-                <a:cs typeface="Malgun Gothic"/>
-              </a:rPr>
-              <a:t>AGPAT</a:t>
-            </a:r>
-            <a:r>
-              <a:rPr sz="1600" b="0" i="0">
-                <a:solidFill>
-                  <a:srgbClr val="11202B"/>
-                </a:solidFill>
-                <a:latin typeface="Malgun Gothic"/>
-                <a:ea typeface="Malgun Gothic"/>
-                <a:cs typeface="Malgun Gothic"/>
-              </a:rPr>
-              <a:t>가 sn-2에 붙여 </a:t>
-            </a:r>
-            <a:r>
-              <a:rPr sz="1600" b="1" i="0">
-                <a:solidFill>
-                  <a:srgbClr val="11202B"/>
-                </a:solidFill>
-                <a:latin typeface="Malgun Gothic"/>
-                <a:ea typeface="Malgun Gothic"/>
-                <a:cs typeface="Malgun Gothic"/>
-              </a:rPr>
-              <a:t>phosphatidate</a:t>
-            </a:r>
-            <a:r>
-              <a:rPr sz="1600" b="0" i="0">
-                <a:solidFill>
-                  <a:srgbClr val="11202B"/>
-                </a:solidFill>
-                <a:latin typeface="Malgun Gothic"/>
-                <a:ea typeface="Malgun Gothic"/>
-                <a:cs typeface="Malgun Gothic"/>
-              </a:rPr>
-              <a:t>(diacylglycerol 3-phosphate)를 만든다. 3. </a:t>
-            </a:r>
-            <a:r>
-              <a:rPr sz="1600" b="1" i="0">
+              <a:rPr sz="1800" b="0" i="0">
+                <a:solidFill>
+                  <a:srgbClr val="11202B"/>
+                </a:solidFill>
+                <a:latin typeface="Malgun Gothic"/>
+                <a:ea typeface="Malgun Gothic"/>
+                <a:cs typeface="Malgun Gothic"/>
+              </a:rPr>
+              <a:t>3. </a:t>
+            </a:r>
+            <a:r>
+              <a:rPr sz="1800" b="1" i="0">
                 <a:solidFill>
                   <a:srgbClr val="11202B"/>
                 </a:solidFill>
@@ -20201,7 +20317,7 @@
               <a:t>Phosphatidate phosphatase(lipin)</a:t>
             </a:r>
             <a:r>
-              <a:rPr sz="1600" b="0" i="0">
+              <a:rPr sz="1800" b="0" i="0">
                 <a:solidFill>
                   <a:srgbClr val="11202B"/>
                 </a:solidFill>
@@ -20212,7 +20328,7 @@
               <a:t>가 인산을 떼어 </a:t>
             </a:r>
             <a:r>
-              <a:rPr sz="1600" b="1" i="0">
+              <a:rPr sz="1800" b="1" i="0">
                 <a:solidFill>
                   <a:srgbClr val="11202B"/>
                 </a:solidFill>
@@ -20223,59 +20339,15 @@
               <a:t>diacylglycerol</a:t>
             </a:r>
             <a:r>
-              <a:rPr sz="1600" b="0" i="0">
-                <a:solidFill>
-                  <a:srgbClr val="11202B"/>
-                </a:solidFill>
-                <a:latin typeface="Malgun Gothic"/>
-                <a:ea typeface="Malgun Gothic"/>
-                <a:cs typeface="Malgun Gothic"/>
-              </a:rPr>
-              <a:t>을 만든다. 4. </a:t>
-            </a:r>
-            <a:r>
-              <a:rPr sz="1600" b="1" i="0">
-                <a:solidFill>
-                  <a:srgbClr val="11202B"/>
-                </a:solidFill>
-                <a:latin typeface="Malgun Gothic"/>
-                <a:ea typeface="Malgun Gothic"/>
-                <a:cs typeface="Malgun Gothic"/>
-              </a:rPr>
-              <a:t>DGAT</a:t>
-            </a:r>
-            <a:r>
-              <a:rPr sz="1600" b="0" i="0">
-                <a:solidFill>
-                  <a:srgbClr val="11202B"/>
-                </a:solidFill>
-                <a:latin typeface="Malgun Gothic"/>
-                <a:ea typeface="Malgun Gothic"/>
-                <a:cs typeface="Malgun Gothic"/>
-              </a:rPr>
-              <a:t>가 sn-3에 세 번째 acyl기를 붙여 </a:t>
-            </a:r>
-            <a:r>
-              <a:rPr sz="1600" b="1" i="0">
-                <a:solidFill>
-                  <a:srgbClr val="11202B"/>
-                </a:solidFill>
-                <a:latin typeface="Malgun Gothic"/>
-                <a:ea typeface="Malgun Gothic"/>
-                <a:cs typeface="Malgun Gothic"/>
-              </a:rPr>
-              <a:t>triacylglycerol</a:t>
-            </a:r>
-            <a:r>
-              <a:rPr sz="1600" b="0" i="0">
-                <a:solidFill>
-                  <a:srgbClr val="11202B"/>
-                </a:solidFill>
-                <a:latin typeface="Malgun Gothic"/>
-                <a:ea typeface="Malgun Gothic"/>
-                <a:cs typeface="Malgun Gothic"/>
-              </a:rPr>
-              <a:t>을 완성한다.</a:t>
+              <a:rPr sz="1800" b="0" i="0">
+                <a:solidFill>
+                  <a:srgbClr val="11202B"/>
+                </a:solidFill>
+                <a:latin typeface="Malgun Gothic"/>
+                <a:ea typeface="Malgun Gothic"/>
+                <a:cs typeface="Malgun Gothic"/>
+              </a:rPr>
+              <a:t>을 만든다.</a:t>
             </a:r>
           </a:p>
           <a:p>
@@ -20285,7 +20357,7 @@
               </a:spcAft>
             </a:pPr>
             <a:r>
-              <a:rPr sz="1600" b="1" i="0">
+              <a:rPr sz="1800" b="1" i="0">
                 <a:solidFill>
                   <a:srgbClr val="F2B705"/>
                 </a:solidFill>
@@ -20296,15 +20368,59 @@
               <a:t>•  </a:t>
             </a:r>
             <a:r>
-              <a:rPr sz="1600" b="1" i="0">
-                <a:solidFill>
-                  <a:srgbClr val="11202B"/>
-                </a:solidFill>
-                <a:latin typeface="Malgun Gothic"/>
-                <a:ea typeface="Malgun Gothic"/>
-                <a:cs typeface="Malgun Gothic"/>
-              </a:rPr>
-              <a:t>(2) Monoacylglycerol 경로 — 소장 상피세포</a:t>
+              <a:rPr sz="1800" b="0" i="0">
+                <a:solidFill>
+                  <a:srgbClr val="11202B"/>
+                </a:solidFill>
+                <a:latin typeface="Malgun Gothic"/>
+                <a:ea typeface="Malgun Gothic"/>
+                <a:cs typeface="Malgun Gothic"/>
+              </a:rPr>
+              <a:t>4. </a:t>
+            </a:r>
+            <a:r>
+              <a:rPr sz="1800" b="1" i="0">
+                <a:solidFill>
+                  <a:srgbClr val="11202B"/>
+                </a:solidFill>
+                <a:latin typeface="Malgun Gothic"/>
+                <a:ea typeface="Malgun Gothic"/>
+                <a:cs typeface="Malgun Gothic"/>
+              </a:rPr>
+              <a:t>DGAT</a:t>
+            </a:r>
+            <a:r>
+              <a:rPr sz="1800" b="0" i="0">
+                <a:solidFill>
+                  <a:srgbClr val="11202B"/>
+                </a:solidFill>
+                <a:latin typeface="Malgun Gothic"/>
+                <a:ea typeface="Malgun Gothic"/>
+                <a:cs typeface="Malgun Gothic"/>
+              </a:rPr>
+              <a:t>가 sn-3에 세 번째 acyl기를 붙여 </a:t>
+            </a:r>
+            <a:r>
+              <a:rPr sz="1800" b="1" i="0">
+                <a:solidFill>
+                  <a:srgbClr val="11202B"/>
+                </a:solidFill>
+                <a:latin typeface="Malgun Gothic"/>
+                <a:ea typeface="Malgun Gothic"/>
+                <a:cs typeface="Malgun Gothic"/>
+              </a:rPr>
+              <a:t>triacylglycerol</a:t>
+            </a:r>
+            <a:r>
+              <a:rPr sz="1800" b="0" i="0">
+                <a:solidFill>
+                  <a:srgbClr val="11202B"/>
+                </a:solidFill>
+                <a:latin typeface="Malgun Gothic"/>
+                <a:ea typeface="Malgun Gothic"/>
+                <a:cs typeface="Malgun Gothic"/>
+              </a:rPr>
+              <a:t>을 완성한다.</a:t>
             </a:r>
           </a:p>
           <a:p>
@@ -20314,7 +20430,7 @@
               </a:spcAft>
             </a:pPr>
             <a:r>
-              <a:rPr sz="1600" b="1" i="0">
+              <a:rPr sz="1800" b="1" i="0">
                 <a:solidFill>
                   <a:srgbClr val="F2B705"/>
                 </a:solidFill>
@@ -20325,7 +20441,36 @@
               <a:t>•  </a:t>
             </a:r>
             <a:r>
-              <a:rPr sz="1600" b="0" i="0">
+              <a:rPr sz="1800" b="1" i="0">
+                <a:solidFill>
+                  <a:srgbClr val="11202B"/>
+                </a:solidFill>
+                <a:latin typeface="Malgun Gothic"/>
+                <a:ea typeface="Malgun Gothic"/>
+                <a:cs typeface="Malgun Gothic"/>
+              </a:rPr>
+              <a:t>(2) Monoacylglycerol 경로 — 소장 상피세포</a:t>
+            </a:r>
+          </a:p>
+          <a:p>
+            <a:pPr>
+              <a:spcAft>
+                <a:spcPts val="900"/>
+              </a:spcAft>
+            </a:pPr>
+            <a:r>
+              <a:rPr sz="1800" b="1" i="0">
+                <a:solidFill>
+                  <a:srgbClr val="F2B705"/>
+                </a:solidFill>
+                <a:latin typeface="Malgun Gothic"/>
+                <a:ea typeface="Malgun Gothic"/>
+                <a:cs typeface="Malgun Gothic"/>
+              </a:rPr>
+              <a:t>•  </a:t>
+            </a:r>
+            <a:r>
+              <a:rPr sz="1800" b="0" i="0">
                 <a:solidFill>
                   <a:srgbClr val="11202B"/>
                 </a:solidFill>
@@ -20336,7 +20481,7 @@
               <a:t>식후 상피세포는 내강에서 2-monoacylglycerol을 그대로 받아들이므로 골격을 새로 만들 필요가 없다. </a:t>
             </a:r>
             <a:r>
-              <a:rPr sz="1600" b="1" i="0">
+              <a:rPr sz="1800" b="1" i="0">
                 <a:solidFill>
                   <a:srgbClr val="11202B"/>
                 </a:solidFill>
@@ -20347,7 +20492,7 @@
               <a:t>MGAT</a:t>
             </a:r>
             <a:r>
-              <a:rPr sz="1600" b="0" i="0">
+              <a:rPr sz="1800" b="0" i="0">
                 <a:solidFill>
                   <a:srgbClr val="11202B"/>
                 </a:solidFill>
@@ -20358,7 +20503,7 @@
               <a:t>가 acyl기를 붙여 diacylglycerol을, </a:t>
             </a:r>
             <a:r>
-              <a:rPr sz="1600" b="1" i="0">
+              <a:rPr sz="1800" b="1" i="0">
                 <a:solidFill>
                   <a:srgbClr val="11202B"/>
                 </a:solidFill>
@@ -20369,7 +20514,7 @@
               <a:t>DGAT</a:t>
             </a:r>
             <a:r>
-              <a:rPr sz="1600" b="0" i="0">
+              <a:rPr sz="1800" b="0" i="0">
                 <a:solidFill>
                   <a:srgbClr val="11202B"/>
                 </a:solidFill>
